--- a/Slides/Demo_Prep.pptx
+++ b/Slides/Demo_Prep.pptx
@@ -5,7 +5,7 @@
     <p:sldMasterId id="2147484209" r:id="rId1"/>
   </p:sldMasterIdLst>
   <p:notesMasterIdLst>
-    <p:notesMasterId r:id="rId11"/>
+    <p:notesMasterId r:id="rId12"/>
   </p:notesMasterIdLst>
   <p:sldIdLst>
     <p:sldId id="256" r:id="rId2"/>
@@ -17,6 +17,7 @@
     <p:sldId id="262" r:id="rId8"/>
     <p:sldId id="263" r:id="rId9"/>
     <p:sldId id="264" r:id="rId10"/>
+    <p:sldId id="265" r:id="rId11"/>
   </p:sldIdLst>
   <p:sldSz cx="12192000" cy="6858000"/>
   <p:notesSz cx="7315200" cy="9601200"/>
@@ -216,7 +217,7 @@
           <a:p>
             <a:fld id="{05DA5B87-4786-42E8-8BFB-5A9FAB7B5E71}" type="datetimeFigureOut">
               <a:rPr lang="en-US" smtClean="0"/>
-              <a:t>2/6/2023</a:t>
+              <a:t>12/4/2024</a:t>
             </a:fld>
             <a:endParaRPr lang="en-US"/>
           </a:p>
@@ -1102,7 +1103,7 @@
             <a:fld id="{B61BEF0D-F0BB-DE4B-95CE-6DB70DBA9567}" type="datetimeFigureOut">
               <a:rPr lang="en-US" smtClean="0"/>
               <a:pPr/>
-              <a:t>2/6/2023</a:t>
+              <a:t>12/4/2024</a:t>
             </a:fld>
             <a:endParaRPr lang="en-US" dirty="0"/>
           </a:p>
@@ -1293,7 +1294,7 @@
           <a:p>
             <a:fld id="{55C6B4A9-1611-4792-9094-5F34BCA07E0B}" type="datetimeFigureOut">
               <a:rPr lang="en-US" smtClean="0"/>
-              <a:t>2/6/2023</a:t>
+              <a:t>12/4/2024</a:t>
             </a:fld>
             <a:endParaRPr lang="en-US" dirty="0"/>
           </a:p>
@@ -1469,7 +1470,7 @@
             <a:fld id="{B61BEF0D-F0BB-DE4B-95CE-6DB70DBA9567}" type="datetimeFigureOut">
               <a:rPr lang="en-US" smtClean="0"/>
               <a:pPr/>
-              <a:t>2/6/2023</a:t>
+              <a:t>12/4/2024</a:t>
             </a:fld>
             <a:endParaRPr lang="en-US" dirty="0"/>
           </a:p>
@@ -1612,7 +1613,7 @@
           <a:p>
             <a:fld id="{42A54C80-263E-416B-A8E0-580EDEADCBDC}" type="datetimeFigureOut">
               <a:rPr lang="en-US" smtClean="0"/>
-              <a:t>2/6/2023</a:t>
+              <a:t>12/4/2024</a:t>
             </a:fld>
             <a:endParaRPr lang="en-US" dirty="0"/>
           </a:p>
@@ -1860,7 +1861,7 @@
             <a:fld id="{B61BEF0D-F0BB-DE4B-95CE-6DB70DBA9567}" type="datetimeFigureOut">
               <a:rPr lang="en-US" smtClean="0"/>
               <a:pPr/>
-              <a:t>2/6/2023</a:t>
+              <a:t>12/4/2024</a:t>
             </a:fld>
             <a:endParaRPr lang="en-US" dirty="0"/>
           </a:p>
@@ -2260,7 +2261,7 @@
           <a:p>
             <a:fld id="{42A54C80-263E-416B-A8E0-580EDEADCBDC}" type="datetimeFigureOut">
               <a:rPr lang="en-US" smtClean="0"/>
-              <a:t>2/6/2023</a:t>
+              <a:t>12/4/2024</a:t>
             </a:fld>
             <a:endParaRPr lang="en-US" dirty="0"/>
           </a:p>
@@ -2699,7 +2700,7 @@
             <a:fld id="{B61BEF0D-F0BB-DE4B-95CE-6DB70DBA9567}" type="datetimeFigureOut">
               <a:rPr lang="en-US" smtClean="0"/>
               <a:pPr/>
-              <a:t>2/6/2023</a:t>
+              <a:t>12/4/2024</a:t>
             </a:fld>
             <a:endParaRPr lang="en-US" dirty="0"/>
           </a:p>
@@ -2796,7 +2797,7 @@
             <a:fld id="{B61BEF0D-F0BB-DE4B-95CE-6DB70DBA9567}" type="datetimeFigureOut">
               <a:rPr lang="en-US" smtClean="0"/>
               <a:pPr/>
-              <a:t>2/6/2023</a:t>
+              <a:t>12/4/2024</a:t>
             </a:fld>
             <a:endParaRPr lang="en-US" dirty="0"/>
           </a:p>
@@ -2911,7 +2912,7 @@
             <a:fld id="{B61BEF0D-F0BB-DE4B-95CE-6DB70DBA9567}" type="datetimeFigureOut">
               <a:rPr lang="en-US" smtClean="0"/>
               <a:pPr/>
-              <a:t>2/6/2023</a:t>
+              <a:t>12/4/2024</a:t>
             </a:fld>
             <a:endParaRPr lang="en-US" dirty="0"/>
           </a:p>
@@ -3180,7 +3181,7 @@
           <a:p>
             <a:fld id="{42A54C80-263E-416B-A8E0-580EDEADCBDC}" type="datetimeFigureOut">
               <a:rPr lang="en-US" smtClean="0"/>
-              <a:t>2/6/2023</a:t>
+              <a:t>12/4/2024</a:t>
             </a:fld>
             <a:endParaRPr lang="en-US" dirty="0"/>
           </a:p>
@@ -3382,7 +3383,7 @@
             <a:fld id="{B61BEF0D-F0BB-DE4B-95CE-6DB70DBA9567}" type="datetimeFigureOut">
               <a:rPr lang="en-US" smtClean="0"/>
               <a:pPr/>
-              <a:t>2/6/2023</a:t>
+              <a:t>12/4/2024</a:t>
             </a:fld>
             <a:endParaRPr lang="en-US" dirty="0"/>
           </a:p>
@@ -4473,7 +4474,7 @@
             <a:fld id="{B61BEF0D-F0BB-DE4B-95CE-6DB70DBA9567}" type="datetimeFigureOut">
               <a:rPr lang="en-US" smtClean="0"/>
               <a:pPr/>
-              <a:t>2/6/2023</a:t>
+              <a:t>12/4/2024</a:t>
             </a:fld>
             <a:endParaRPr lang="en-US" dirty="0"/>
           </a:p>
@@ -4940,6 +4941,123 @@
 </p:sld>
 </file>
 
+<file path=ppt/slides/slide10.xml><?xml version="1.0" encoding="utf-8"?>
+<p:sld xmlns:a="http://schemas.openxmlformats.org/drawingml/2006/main" xmlns:r="http://schemas.openxmlformats.org/officeDocument/2006/relationships" xmlns:p="http://schemas.openxmlformats.org/presentationml/2006/main">
+  <p:cSld>
+    <p:spTree>
+      <p:nvGrpSpPr>
+        <p:cNvPr id="1" name=""/>
+        <p:cNvGrpSpPr/>
+        <p:nvPr/>
+      </p:nvGrpSpPr>
+      <p:grpSpPr>
+        <a:xfrm>
+          <a:off x="0" y="0"/>
+          <a:ext cx="0" cy="0"/>
+          <a:chOff x="0" y="0"/>
+          <a:chExt cx="0" cy="0"/>
+        </a:xfrm>
+      </p:grpSpPr>
+      <p:sp>
+        <p:nvSpPr>
+          <p:cNvPr id="2" name="Content Placeholder 1"/>
+          <p:cNvSpPr>
+            <a:spLocks noGrp="1"/>
+          </p:cNvSpPr>
+          <p:nvPr>
+            <p:ph idx="1"/>
+          </p:nvPr>
+        </p:nvSpPr>
+        <p:spPr>
+          <a:xfrm>
+            <a:off x="609600" y="1204857"/>
+            <a:ext cx="10972800" cy="4991548"/>
+          </a:xfrm>
+        </p:spPr>
+        <p:txBody>
+          <a:bodyPr>
+            <a:normAutofit/>
+          </a:bodyPr>
+          <a:lstStyle/>
+          <a:p>
+            <a:r>
+              <a:rPr lang="en-US" dirty="0" smtClean="0"/>
+              <a:t>Have </a:t>
+            </a:r>
+            <a:r>
+              <a:rPr lang="en-US" dirty="0" smtClean="0"/>
+              <a:t>the whole team materially participate in some way</a:t>
+            </a:r>
+          </a:p>
+          <a:p>
+            <a:r>
+              <a:rPr lang="en-US" dirty="0" smtClean="0"/>
+              <a:t>Have the demo </a:t>
+            </a:r>
+            <a:r>
+              <a:rPr lang="en-US" dirty="0" smtClean="0"/>
+              <a:t>portion run </a:t>
+            </a:r>
+            <a:r>
+              <a:rPr lang="en-US" dirty="0" smtClean="0"/>
+              <a:t>between 4 and 5 </a:t>
+            </a:r>
+            <a:r>
+              <a:rPr lang="en-US" dirty="0" smtClean="0"/>
+              <a:t>minutes</a:t>
+            </a:r>
+          </a:p>
+          <a:p>
+            <a:r>
+              <a:rPr lang="en-US" dirty="0" smtClean="0"/>
+              <a:t>Make sure the game sound levels are loud enough to hear but not so loud that we can’t hear you talk over them</a:t>
+            </a:r>
+          </a:p>
+          <a:p>
+            <a:r>
+              <a:rPr lang="en-US" dirty="0" smtClean="0"/>
+              <a:t>Make it look practiced and smooth</a:t>
+            </a:r>
+            <a:endParaRPr lang="en-US" dirty="0"/>
+          </a:p>
+        </p:txBody>
+      </p:sp>
+      <p:sp>
+        <p:nvSpPr>
+          <p:cNvPr id="3" name="Title 2"/>
+          <p:cNvSpPr>
+            <a:spLocks noGrp="1"/>
+          </p:cNvSpPr>
+          <p:nvPr>
+            <p:ph type="title"/>
+          </p:nvPr>
+        </p:nvSpPr>
+        <p:spPr/>
+        <p:txBody>
+          <a:bodyPr/>
+          <a:lstStyle/>
+          <a:p>
+            <a:r>
+              <a:rPr lang="en-US" dirty="0" smtClean="0"/>
+              <a:t>How not to lose points</a:t>
+            </a:r>
+            <a:endParaRPr lang="en-US" dirty="0"/>
+          </a:p>
+        </p:txBody>
+      </p:sp>
+    </p:spTree>
+    <p:extLst>
+      <p:ext uri="{BB962C8B-B14F-4D97-AF65-F5344CB8AC3E}">
+        <p14:creationId xmlns:p14="http://schemas.microsoft.com/office/powerpoint/2010/main" val="672520271"/>
+      </p:ext>
+    </p:extLst>
+  </p:cSld>
+  <p:clrMapOvr>
+    <a:masterClrMapping/>
+  </p:clrMapOvr>
+</p:sld>
+</file>
+
 <file path=ppt/slides/slide2.xml><?xml version="1.0" encoding="utf-8"?>
 <p:sld xmlns:a="http://schemas.openxmlformats.org/drawingml/2006/main" xmlns:r="http://schemas.openxmlformats.org/officeDocument/2006/relationships" xmlns:p="http://schemas.openxmlformats.org/presentationml/2006/main">
   <p:cSld>
@@ -4986,8 +5104,25 @@
           <a:p>
             <a:r>
               <a:rPr lang="en-US" dirty="0" smtClean="0"/>
-              <a:t>5 minute (max) demo</a:t>
-            </a:r>
+              <a:t>5 minute (max) </a:t>
+            </a:r>
+            <a:r>
+              <a:rPr lang="en-US" dirty="0" smtClean="0"/>
+              <a:t>demo</a:t>
+            </a:r>
+          </a:p>
+          <a:p>
+            <a:endParaRPr lang="en-US" dirty="0"/>
+          </a:p>
+          <a:p>
+            <a:pPr marL="109728" indent="0">
+              <a:buNone/>
+            </a:pPr>
+            <a:r>
+              <a:rPr lang="en-US" dirty="0" smtClean="0"/>
+              <a:t>(Those time buckets are independent of each other; time spent introducing the team and listing the upcoming features is separate from the time spent running the live demo.)</a:t>
+            </a:r>
+            <a:endParaRPr lang="en-US" dirty="0" smtClean="0"/>
           </a:p>
           <a:p>
             <a:endParaRPr lang="en-US" dirty="0"/>
@@ -5092,16 +5227,36 @@
           <a:p>
             <a:r>
               <a:rPr lang="en-US" dirty="0" smtClean="0"/>
-              <a:t>Email to me by Friday, </a:t>
+              <a:t>Email to me by </a:t>
             </a:r>
             <a:r>
               <a:rPr lang="en-US" dirty="0" smtClean="0"/>
-              <a:t>21-April-2023, </a:t>
+              <a:t>Monday</a:t>
+            </a:r>
+            <a:r>
+              <a:rPr lang="en-US" smtClean="0"/>
+              <a:t>, 2-December-2024, </a:t>
             </a:r>
             <a:r>
               <a:rPr lang="en-US" dirty="0" smtClean="0"/>
               <a:t>midnight.   </a:t>
             </a:r>
+            <a:endParaRPr lang="en-US" dirty="0" smtClean="0"/>
+          </a:p>
+          <a:p>
+            <a:r>
+              <a:rPr lang="en-US" dirty="0" smtClean="0"/>
+              <a:t>PowerPoint </a:t>
+            </a:r>
+            <a:r>
+              <a:rPr lang="en-US" dirty="0" err="1" smtClean="0"/>
+              <a:t>pptx</a:t>
+            </a:r>
+            <a:r>
+              <a:rPr lang="en-US" dirty="0" smtClean="0"/>
+              <a:t> format only</a:t>
+            </a:r>
+            <a:endParaRPr lang="en-US" dirty="0" smtClean="0"/>
           </a:p>
           <a:p>
             <a:r>
@@ -5798,7 +5953,7 @@
         <p:spPr>
           <a:xfrm>
             <a:off x="609600" y="1204857"/>
-            <a:ext cx="10972800" cy="4991548"/>
+            <a:ext cx="10972800" cy="4973874"/>
           </a:xfrm>
         </p:spPr>
         <p:txBody>
@@ -5827,21 +5982,15 @@
           <a:p>
             <a:r>
               <a:rPr lang="en-US" dirty="0" smtClean="0"/>
-              <a:t>Slide in some commentary about the tech underpinning the features as you go over the features</a:t>
-            </a:r>
-          </a:p>
-          <a:p>
+              <a:t>Slide in some commentary about the tech underpinning the features as you go over the </a:t>
+            </a:r>
             <a:r>
               <a:rPr lang="en-US" dirty="0" smtClean="0"/>
-              <a:t>Have the whole team materially participate in some way</a:t>
-            </a:r>
-          </a:p>
-          <a:p>
-            <a:r>
-              <a:rPr lang="en-US" dirty="0" smtClean="0"/>
-              <a:t>Have the demo run between 4 and 5 minutes</a:t>
-            </a:r>
-            <a:endParaRPr lang="en-US" dirty="0"/>
+              <a:t>features</a:t>
+            </a:r>
+          </a:p>
+          <a:p>
+            <a:endParaRPr lang="en-US" dirty="0" smtClean="0"/>
           </a:p>
         </p:txBody>
       </p:sp>

--- a/Slides/Demo_Prep.pptx
+++ b/Slides/Demo_Prep.pptx
@@ -217,7 +217,7 @@
           <a:p>
             <a:fld id="{05DA5B87-4786-42E8-8BFB-5A9FAB7B5E71}" type="datetimeFigureOut">
               <a:rPr lang="en-US" smtClean="0"/>
-              <a:t>12/4/2024</a:t>
+              <a:t>1/2/2025</a:t>
             </a:fld>
             <a:endParaRPr lang="en-US"/>
           </a:p>
@@ -281,38 +281,37 @@
           <a:p>
             <a:pPr lvl="0"/>
             <a:r>
-              <a:rPr lang="en-US" smtClean="0"/>
+              <a:rPr lang="en-US"/>
               <a:t>Click to edit Master text styles</a:t>
             </a:r>
           </a:p>
           <a:p>
             <a:pPr lvl="1"/>
             <a:r>
-              <a:rPr lang="en-US" smtClean="0"/>
+              <a:rPr lang="en-US"/>
               <a:t>Second level</a:t>
             </a:r>
           </a:p>
           <a:p>
             <a:pPr lvl="2"/>
             <a:r>
-              <a:rPr lang="en-US" smtClean="0"/>
+              <a:rPr lang="en-US"/>
               <a:t>Third level</a:t>
             </a:r>
           </a:p>
           <a:p>
             <a:pPr lvl="3"/>
             <a:r>
-              <a:rPr lang="en-US" smtClean="0"/>
+              <a:rPr lang="en-US"/>
               <a:t>Fourth level</a:t>
             </a:r>
           </a:p>
           <a:p>
             <a:pPr lvl="4"/>
             <a:r>
-              <a:rPr lang="en-US" smtClean="0"/>
+              <a:rPr lang="en-US"/>
               <a:t>Fifth level</a:t>
             </a:r>
-            <a:endParaRPr lang="en-US"/>
           </a:p>
         </p:txBody>
       </p:sp>
@@ -618,10 +617,9 @@
           </a:lstStyle>
           <a:p>
             <a:r>
-              <a:rPr kumimoji="0" lang="en-US" smtClean="0"/>
+              <a:rPr kumimoji="0" lang="en-US"/>
               <a:t>Click to edit Master title style</a:t>
             </a:r>
-            <a:endParaRPr kumimoji="0" lang="en-US"/>
           </a:p>
         </p:txBody>
       </p:sp>
@@ -680,10 +678,9 @@
           </a:lstStyle>
           <a:p>
             <a:r>
-              <a:rPr kumimoji="0" lang="en-US" smtClean="0"/>
+              <a:rPr kumimoji="0" lang="en-US"/>
               <a:t>Click to edit Master subtitle style</a:t>
             </a:r>
-            <a:endParaRPr kumimoji="0" lang="en-US"/>
           </a:p>
         </p:txBody>
       </p:sp>
@@ -1103,7 +1100,7 @@
             <a:fld id="{B61BEF0D-F0BB-DE4B-95CE-6DB70DBA9567}" type="datetimeFigureOut">
               <a:rPr lang="en-US" smtClean="0"/>
               <a:pPr/>
-              <a:t>12/4/2024</a:t>
+              <a:t>1/2/2025</a:t>
             </a:fld>
             <a:endParaRPr lang="en-US" dirty="0"/>
           </a:p>
@@ -1213,10 +1210,9 @@
           <a:lstStyle/>
           <a:p>
             <a:r>
-              <a:rPr kumimoji="0" lang="en-US" smtClean="0"/>
+              <a:rPr kumimoji="0" lang="en-US"/>
               <a:t>Click to edit Master title style</a:t>
             </a:r>
-            <a:endParaRPr kumimoji="0" lang="en-US"/>
           </a:p>
         </p:txBody>
       </p:sp>
@@ -1242,35 +1238,35 @@
           <a:p>
             <a:pPr lvl="0" eaLnBrk="1" latinLnBrk="0" hangingPunct="1"/>
             <a:r>
-              <a:rPr lang="en-US" smtClean="0"/>
+              <a:rPr lang="en-US"/>
               <a:t>Click to edit Master text styles</a:t>
             </a:r>
           </a:p>
           <a:p>
             <a:pPr lvl="1" eaLnBrk="1" latinLnBrk="0" hangingPunct="1"/>
             <a:r>
-              <a:rPr lang="en-US" smtClean="0"/>
+              <a:rPr lang="en-US"/>
               <a:t>Second level</a:t>
             </a:r>
           </a:p>
           <a:p>
             <a:pPr lvl="2" eaLnBrk="1" latinLnBrk="0" hangingPunct="1"/>
             <a:r>
-              <a:rPr lang="en-US" smtClean="0"/>
+              <a:rPr lang="en-US"/>
               <a:t>Third level</a:t>
             </a:r>
           </a:p>
           <a:p>
             <a:pPr lvl="3" eaLnBrk="1" latinLnBrk="0" hangingPunct="1"/>
             <a:r>
-              <a:rPr lang="en-US" smtClean="0"/>
+              <a:rPr lang="en-US"/>
               <a:t>Fourth level</a:t>
             </a:r>
           </a:p>
           <a:p>
             <a:pPr lvl="4" eaLnBrk="1" latinLnBrk="0" hangingPunct="1"/>
             <a:r>
-              <a:rPr lang="en-US" smtClean="0"/>
+              <a:rPr lang="en-US"/>
               <a:t>Fifth level</a:t>
             </a:r>
             <a:endParaRPr kumimoji="0" lang="en-US"/>
@@ -1294,7 +1290,7 @@
           <a:p>
             <a:fld id="{55C6B4A9-1611-4792-9094-5F34BCA07E0B}" type="datetimeFigureOut">
               <a:rPr lang="en-US" smtClean="0"/>
-              <a:t>12/4/2024</a:t>
+              <a:t>1/2/2025</a:t>
             </a:fld>
             <a:endParaRPr lang="en-US" dirty="0"/>
           </a:p>
@@ -1388,10 +1384,9 @@
           <a:lstStyle/>
           <a:p>
             <a:r>
-              <a:rPr kumimoji="0" lang="en-US" smtClean="0"/>
+              <a:rPr kumimoji="0" lang="en-US"/>
               <a:t>Click to edit Master title style</a:t>
             </a:r>
-            <a:endParaRPr kumimoji="0" lang="en-US"/>
           </a:p>
         </p:txBody>
       </p:sp>
@@ -1417,35 +1412,35 @@
           <a:p>
             <a:pPr lvl="0" eaLnBrk="1" latinLnBrk="0" hangingPunct="1"/>
             <a:r>
-              <a:rPr lang="en-US" smtClean="0"/>
+              <a:rPr lang="en-US"/>
               <a:t>Click to edit Master text styles</a:t>
             </a:r>
           </a:p>
           <a:p>
             <a:pPr lvl="1" eaLnBrk="1" latinLnBrk="0" hangingPunct="1"/>
             <a:r>
-              <a:rPr lang="en-US" smtClean="0"/>
+              <a:rPr lang="en-US"/>
               <a:t>Second level</a:t>
             </a:r>
           </a:p>
           <a:p>
             <a:pPr lvl="2" eaLnBrk="1" latinLnBrk="0" hangingPunct="1"/>
             <a:r>
-              <a:rPr lang="en-US" smtClean="0"/>
+              <a:rPr lang="en-US"/>
               <a:t>Third level</a:t>
             </a:r>
           </a:p>
           <a:p>
             <a:pPr lvl="3" eaLnBrk="1" latinLnBrk="0" hangingPunct="1"/>
             <a:r>
-              <a:rPr lang="en-US" smtClean="0"/>
+              <a:rPr lang="en-US"/>
               <a:t>Fourth level</a:t>
             </a:r>
           </a:p>
           <a:p>
             <a:pPr lvl="4" eaLnBrk="1" latinLnBrk="0" hangingPunct="1"/>
             <a:r>
-              <a:rPr lang="en-US" smtClean="0"/>
+              <a:rPr lang="en-US"/>
               <a:t>Fifth level</a:t>
             </a:r>
             <a:endParaRPr kumimoji="0" lang="en-US"/>
@@ -1470,7 +1465,7 @@
             <a:fld id="{B61BEF0D-F0BB-DE4B-95CE-6DB70DBA9567}" type="datetimeFigureOut">
               <a:rPr lang="en-US" smtClean="0"/>
               <a:pPr/>
-              <a:t>12/4/2024</a:t>
+              <a:t>1/2/2025</a:t>
             </a:fld>
             <a:endParaRPr lang="en-US" dirty="0"/>
           </a:p>
@@ -1561,35 +1556,35 @@
           <a:p>
             <a:pPr lvl="0" eaLnBrk="1" latinLnBrk="0" hangingPunct="1"/>
             <a:r>
-              <a:rPr lang="en-US" smtClean="0"/>
+              <a:rPr lang="en-US"/>
               <a:t>Click to edit Master text styles</a:t>
             </a:r>
           </a:p>
           <a:p>
             <a:pPr lvl="1" eaLnBrk="1" latinLnBrk="0" hangingPunct="1"/>
             <a:r>
-              <a:rPr lang="en-US" smtClean="0"/>
+              <a:rPr lang="en-US"/>
               <a:t>Second level</a:t>
             </a:r>
           </a:p>
           <a:p>
             <a:pPr lvl="2" eaLnBrk="1" latinLnBrk="0" hangingPunct="1"/>
             <a:r>
-              <a:rPr lang="en-US" smtClean="0"/>
+              <a:rPr lang="en-US"/>
               <a:t>Third level</a:t>
             </a:r>
           </a:p>
           <a:p>
             <a:pPr lvl="3" eaLnBrk="1" latinLnBrk="0" hangingPunct="1"/>
             <a:r>
-              <a:rPr lang="en-US" smtClean="0"/>
+              <a:rPr lang="en-US"/>
               <a:t>Fourth level</a:t>
             </a:r>
           </a:p>
           <a:p>
             <a:pPr lvl="4" eaLnBrk="1" latinLnBrk="0" hangingPunct="1"/>
             <a:r>
-              <a:rPr lang="en-US" smtClean="0"/>
+              <a:rPr lang="en-US"/>
               <a:t>Fifth level</a:t>
             </a:r>
             <a:endParaRPr kumimoji="0" lang="en-US"/>
@@ -1613,7 +1608,7 @@
           <a:p>
             <a:fld id="{42A54C80-263E-416B-A8E0-580EDEADCBDC}" type="datetimeFigureOut">
               <a:rPr lang="en-US" smtClean="0"/>
-              <a:t>12/4/2024</a:t>
+              <a:t>1/2/2025</a:t>
             </a:fld>
             <a:endParaRPr lang="en-US" dirty="0"/>
           </a:p>
@@ -1677,10 +1672,9 @@
           <a:lstStyle/>
           <a:p>
             <a:r>
-              <a:rPr kumimoji="0" lang="en-US" smtClean="0"/>
+              <a:rPr kumimoji="0" lang="en-US"/>
               <a:t>Click to edit Master title style</a:t>
             </a:r>
-            <a:endParaRPr kumimoji="0" lang="en-US"/>
           </a:p>
         </p:txBody>
       </p:sp>
@@ -1758,10 +1752,9 @@
           </a:lstStyle>
           <a:p>
             <a:r>
-              <a:rPr kumimoji="0" lang="en-US" smtClean="0"/>
+              <a:rPr kumimoji="0" lang="en-US"/>
               <a:t>Click to edit Master title style</a:t>
             </a:r>
-            <a:endParaRPr kumimoji="0" lang="en-US"/>
           </a:p>
         </p:txBody>
       </p:sp>
@@ -1837,7 +1830,7 @@
           <a:p>
             <a:pPr lvl="0" eaLnBrk="1" latinLnBrk="0" hangingPunct="1"/>
             <a:r>
-              <a:rPr kumimoji="0" lang="en-US" smtClean="0"/>
+              <a:rPr kumimoji="0" lang="en-US"/>
               <a:t>Click to edit Master text styles</a:t>
             </a:r>
           </a:p>
@@ -1861,7 +1854,7 @@
             <a:fld id="{B61BEF0D-F0BB-DE4B-95CE-6DB70DBA9567}" type="datetimeFigureOut">
               <a:rPr lang="en-US" smtClean="0"/>
               <a:pPr/>
-              <a:t>12/4/2024</a:t>
+              <a:t>1/2/2025</a:t>
             </a:fld>
             <a:endParaRPr lang="en-US" dirty="0"/>
           </a:p>
@@ -2135,35 +2128,35 @@
           <a:p>
             <a:pPr lvl="0" eaLnBrk="1" latinLnBrk="0" hangingPunct="1"/>
             <a:r>
-              <a:rPr lang="en-US" smtClean="0"/>
+              <a:rPr lang="en-US"/>
               <a:t>Click to edit Master text styles</a:t>
             </a:r>
           </a:p>
           <a:p>
             <a:pPr lvl="1" eaLnBrk="1" latinLnBrk="0" hangingPunct="1"/>
             <a:r>
-              <a:rPr lang="en-US" smtClean="0"/>
+              <a:rPr lang="en-US"/>
               <a:t>Second level</a:t>
             </a:r>
           </a:p>
           <a:p>
             <a:pPr lvl="2" eaLnBrk="1" latinLnBrk="0" hangingPunct="1"/>
             <a:r>
-              <a:rPr lang="en-US" smtClean="0"/>
+              <a:rPr lang="en-US"/>
               <a:t>Third level</a:t>
             </a:r>
           </a:p>
           <a:p>
             <a:pPr lvl="3" eaLnBrk="1" latinLnBrk="0" hangingPunct="1"/>
             <a:r>
-              <a:rPr lang="en-US" smtClean="0"/>
+              <a:rPr lang="en-US"/>
               <a:t>Fourth level</a:t>
             </a:r>
           </a:p>
           <a:p>
             <a:pPr lvl="4" eaLnBrk="1" latinLnBrk="0" hangingPunct="1"/>
             <a:r>
-              <a:rPr lang="en-US" smtClean="0"/>
+              <a:rPr lang="en-US"/>
               <a:t>Fifth level</a:t>
             </a:r>
             <a:endParaRPr kumimoji="0" lang="en-US"/>
@@ -2209,35 +2202,35 @@
           <a:p>
             <a:pPr lvl="0" eaLnBrk="1" latinLnBrk="0" hangingPunct="1"/>
             <a:r>
-              <a:rPr lang="en-US" smtClean="0"/>
+              <a:rPr lang="en-US"/>
               <a:t>Click to edit Master text styles</a:t>
             </a:r>
           </a:p>
           <a:p>
             <a:pPr lvl="1" eaLnBrk="1" latinLnBrk="0" hangingPunct="1"/>
             <a:r>
-              <a:rPr lang="en-US" smtClean="0"/>
+              <a:rPr lang="en-US"/>
               <a:t>Second level</a:t>
             </a:r>
           </a:p>
           <a:p>
             <a:pPr lvl="2" eaLnBrk="1" latinLnBrk="0" hangingPunct="1"/>
             <a:r>
-              <a:rPr lang="en-US" smtClean="0"/>
+              <a:rPr lang="en-US"/>
               <a:t>Third level</a:t>
             </a:r>
           </a:p>
           <a:p>
             <a:pPr lvl="3" eaLnBrk="1" latinLnBrk="0" hangingPunct="1"/>
             <a:r>
-              <a:rPr lang="en-US" smtClean="0"/>
+              <a:rPr lang="en-US"/>
               <a:t>Fourth level</a:t>
             </a:r>
           </a:p>
           <a:p>
             <a:pPr lvl="4" eaLnBrk="1" latinLnBrk="0" hangingPunct="1"/>
             <a:r>
-              <a:rPr lang="en-US" smtClean="0"/>
+              <a:rPr lang="en-US"/>
               <a:t>Fifth level</a:t>
             </a:r>
             <a:endParaRPr kumimoji="0" lang="en-US"/>
@@ -2261,7 +2254,7 @@
           <a:p>
             <a:fld id="{42A54C80-263E-416B-A8E0-580EDEADCBDC}" type="datetimeFigureOut">
               <a:rPr lang="en-US" smtClean="0"/>
-              <a:t>12/4/2024</a:t>
+              <a:t>1/2/2025</a:t>
             </a:fld>
             <a:endParaRPr lang="en-US" dirty="0"/>
           </a:p>
@@ -2325,10 +2318,9 @@
           <a:lstStyle/>
           <a:p>
             <a:r>
-              <a:rPr kumimoji="0" lang="en-US" smtClean="0"/>
+              <a:rPr kumimoji="0" lang="en-US"/>
               <a:t>Click to edit Master title style</a:t>
             </a:r>
-            <a:endParaRPr kumimoji="0" lang="en-US"/>
           </a:p>
         </p:txBody>
       </p:sp>
@@ -2388,10 +2380,9 @@
           </a:lstStyle>
           <a:p>
             <a:r>
-              <a:rPr kumimoji="0" lang="en-US" smtClean="0"/>
+              <a:rPr kumimoji="0" lang="en-US"/>
               <a:t>Click to edit Master title style</a:t>
             </a:r>
-            <a:endParaRPr kumimoji="0" lang="en-US"/>
           </a:p>
         </p:txBody>
       </p:sp>
@@ -2452,7 +2443,7 @@
           <a:p>
             <a:pPr lvl="0" eaLnBrk="1" latinLnBrk="0" hangingPunct="1"/>
             <a:r>
-              <a:rPr kumimoji="0" lang="en-US" smtClean="0"/>
+              <a:rPr kumimoji="0" lang="en-US"/>
               <a:t>Click to edit Master text styles</a:t>
             </a:r>
           </a:p>
@@ -2515,7 +2506,7 @@
           <a:p>
             <a:pPr lvl="0" eaLnBrk="1" latinLnBrk="0" hangingPunct="1"/>
             <a:r>
-              <a:rPr kumimoji="0" lang="en-US" smtClean="0"/>
+              <a:rPr kumimoji="0" lang="en-US"/>
               <a:t>Click to edit Master text styles</a:t>
             </a:r>
           </a:p>
@@ -2565,35 +2556,35 @@
           <a:p>
             <a:pPr lvl="0" eaLnBrk="1" latinLnBrk="0" hangingPunct="1"/>
             <a:r>
-              <a:rPr lang="en-US" smtClean="0"/>
+              <a:rPr lang="en-US"/>
               <a:t>Click to edit Master text styles</a:t>
             </a:r>
           </a:p>
           <a:p>
             <a:pPr lvl="1" eaLnBrk="1" latinLnBrk="0" hangingPunct="1"/>
             <a:r>
-              <a:rPr lang="en-US" smtClean="0"/>
+              <a:rPr lang="en-US"/>
               <a:t>Second level</a:t>
             </a:r>
           </a:p>
           <a:p>
             <a:pPr lvl="2" eaLnBrk="1" latinLnBrk="0" hangingPunct="1"/>
             <a:r>
-              <a:rPr lang="en-US" smtClean="0"/>
+              <a:rPr lang="en-US"/>
               <a:t>Third level</a:t>
             </a:r>
           </a:p>
           <a:p>
             <a:pPr lvl="3" eaLnBrk="1" latinLnBrk="0" hangingPunct="1"/>
             <a:r>
-              <a:rPr lang="en-US" smtClean="0"/>
+              <a:rPr lang="en-US"/>
               <a:t>Fourth level</a:t>
             </a:r>
           </a:p>
           <a:p>
             <a:pPr lvl="4" eaLnBrk="1" latinLnBrk="0" hangingPunct="1"/>
             <a:r>
-              <a:rPr lang="en-US" smtClean="0"/>
+              <a:rPr lang="en-US"/>
               <a:t>Fifth level</a:t>
             </a:r>
             <a:endParaRPr kumimoji="0" lang="en-US"/>
@@ -2647,35 +2638,35 @@
           <a:p>
             <a:pPr lvl="0" eaLnBrk="1" latinLnBrk="0" hangingPunct="1"/>
             <a:r>
-              <a:rPr lang="en-US" smtClean="0"/>
+              <a:rPr lang="en-US"/>
               <a:t>Click to edit Master text styles</a:t>
             </a:r>
           </a:p>
           <a:p>
             <a:pPr lvl="1" eaLnBrk="1" latinLnBrk="0" hangingPunct="1"/>
             <a:r>
-              <a:rPr lang="en-US" smtClean="0"/>
+              <a:rPr lang="en-US"/>
               <a:t>Second level</a:t>
             </a:r>
           </a:p>
           <a:p>
             <a:pPr lvl="2" eaLnBrk="1" latinLnBrk="0" hangingPunct="1"/>
             <a:r>
-              <a:rPr lang="en-US" smtClean="0"/>
+              <a:rPr lang="en-US"/>
               <a:t>Third level</a:t>
             </a:r>
           </a:p>
           <a:p>
             <a:pPr lvl="3" eaLnBrk="1" latinLnBrk="0" hangingPunct="1"/>
             <a:r>
-              <a:rPr lang="en-US" smtClean="0"/>
+              <a:rPr lang="en-US"/>
               <a:t>Fourth level</a:t>
             </a:r>
           </a:p>
           <a:p>
             <a:pPr lvl="4" eaLnBrk="1" latinLnBrk="0" hangingPunct="1"/>
             <a:r>
-              <a:rPr lang="en-US" smtClean="0"/>
+              <a:rPr lang="en-US"/>
               <a:t>Fifth level</a:t>
             </a:r>
             <a:endParaRPr kumimoji="0" lang="en-US"/>
@@ -2700,7 +2691,7 @@
             <a:fld id="{B61BEF0D-F0BB-DE4B-95CE-6DB70DBA9567}" type="datetimeFigureOut">
               <a:rPr lang="en-US" smtClean="0"/>
               <a:pPr/>
-              <a:t>12/4/2024</a:t>
+              <a:t>1/2/2025</a:t>
             </a:fld>
             <a:endParaRPr lang="en-US" dirty="0"/>
           </a:p>
@@ -2797,7 +2788,7 @@
             <a:fld id="{B61BEF0D-F0BB-DE4B-95CE-6DB70DBA9567}" type="datetimeFigureOut">
               <a:rPr lang="en-US" smtClean="0"/>
               <a:pPr/>
-              <a:t>12/4/2024</a:t>
+              <a:t>1/2/2025</a:t>
             </a:fld>
             <a:endParaRPr lang="en-US" dirty="0"/>
           </a:p>
@@ -2862,10 +2853,9 @@
           <a:lstStyle/>
           <a:p>
             <a:r>
-              <a:rPr kumimoji="0" lang="en-US" smtClean="0"/>
+              <a:rPr kumimoji="0" lang="en-US"/>
               <a:t>Click to edit Master title style</a:t>
             </a:r>
-            <a:endParaRPr kumimoji="0" lang="en-US"/>
           </a:p>
         </p:txBody>
       </p:sp>
@@ -2912,7 +2902,7 @@
             <a:fld id="{B61BEF0D-F0BB-DE4B-95CE-6DB70DBA9567}" type="datetimeFigureOut">
               <a:rPr lang="en-US" smtClean="0"/>
               <a:pPr/>
-              <a:t>12/4/2024</a:t>
+              <a:t>1/2/2025</a:t>
             </a:fld>
             <a:endParaRPr lang="en-US" dirty="0"/>
           </a:p>
@@ -3028,10 +3018,9 @@
           </a:lstStyle>
           <a:p>
             <a:r>
-              <a:rPr kumimoji="0" lang="en-US" smtClean="0"/>
+              <a:rPr kumimoji="0" lang="en-US"/>
               <a:t>Click to edit Master title style</a:t>
             </a:r>
-            <a:endParaRPr kumimoji="0" lang="en-US"/>
           </a:p>
         </p:txBody>
       </p:sp>
@@ -3079,7 +3068,7 @@
           <a:p>
             <a:pPr lvl="0" eaLnBrk="1" latinLnBrk="0" hangingPunct="1"/>
             <a:r>
-              <a:rPr kumimoji="0" lang="en-US" smtClean="0"/>
+              <a:rPr kumimoji="0" lang="en-US"/>
               <a:t>Click to edit Master text styles</a:t>
             </a:r>
           </a:p>
@@ -3124,35 +3113,35 @@
           <a:p>
             <a:pPr lvl="0" eaLnBrk="1" latinLnBrk="0" hangingPunct="1"/>
             <a:r>
-              <a:rPr lang="en-US" smtClean="0"/>
+              <a:rPr lang="en-US"/>
               <a:t>Click to edit Master text styles</a:t>
             </a:r>
           </a:p>
           <a:p>
             <a:pPr lvl="1" eaLnBrk="1" latinLnBrk="0" hangingPunct="1"/>
             <a:r>
-              <a:rPr lang="en-US" smtClean="0"/>
+              <a:rPr lang="en-US"/>
               <a:t>Second level</a:t>
             </a:r>
           </a:p>
           <a:p>
             <a:pPr lvl="2" eaLnBrk="1" latinLnBrk="0" hangingPunct="1"/>
             <a:r>
-              <a:rPr lang="en-US" smtClean="0"/>
+              <a:rPr lang="en-US"/>
               <a:t>Third level</a:t>
             </a:r>
           </a:p>
           <a:p>
             <a:pPr lvl="3" eaLnBrk="1" latinLnBrk="0" hangingPunct="1"/>
             <a:r>
-              <a:rPr lang="en-US" smtClean="0"/>
+              <a:rPr lang="en-US"/>
               <a:t>Fourth level</a:t>
             </a:r>
           </a:p>
           <a:p>
             <a:pPr lvl="4" eaLnBrk="1" latinLnBrk="0" hangingPunct="1"/>
             <a:r>
-              <a:rPr lang="en-US" smtClean="0"/>
+              <a:rPr lang="en-US"/>
               <a:t>Fifth level</a:t>
             </a:r>
             <a:endParaRPr kumimoji="0" lang="en-US"/>
@@ -3181,7 +3170,7 @@
           <a:p>
             <a:fld id="{42A54C80-263E-416B-A8E0-580EDEADCBDC}" type="datetimeFigureOut">
               <a:rPr lang="en-US" smtClean="0"/>
-              <a:t>12/4/2024</a:t>
+              <a:t>1/2/2025</a:t>
             </a:fld>
             <a:endParaRPr lang="en-US" dirty="0"/>
           </a:p>
@@ -3300,7 +3289,7 @@
           <a:p>
             <a:pPr lvl="0" eaLnBrk="1" latinLnBrk="0" hangingPunct="1"/>
             <a:r>
-              <a:rPr kumimoji="0" lang="en-US" smtClean="0"/>
+              <a:rPr kumimoji="0" lang="en-US"/>
               <a:t>Click to edit Master text styles</a:t>
             </a:r>
           </a:p>
@@ -3349,7 +3338,7 @@
           </a:lstStyle>
           <a:p>
             <a:r>
-              <a:rPr kumimoji="0" lang="en-US" smtClean="0"/>
+              <a:rPr kumimoji="0" lang="en-US"/>
               <a:t>Click icon to add picture</a:t>
             </a:r>
             <a:endParaRPr kumimoji="0" lang="en-US" dirty="0"/>
@@ -3383,7 +3372,7 @@
             <a:fld id="{B61BEF0D-F0BB-DE4B-95CE-6DB70DBA9567}" type="datetimeFigureOut">
               <a:rPr lang="en-US" smtClean="0"/>
               <a:pPr/>
-              <a:t>12/4/2024</a:t>
+              <a:t>1/2/2025</a:t>
             </a:fld>
             <a:endParaRPr lang="en-US" dirty="0"/>
           </a:p>
@@ -3496,10 +3485,9 @@
           </a:lstStyle>
           <a:p>
             <a:r>
-              <a:rPr kumimoji="0" lang="en-US" smtClean="0"/>
+              <a:rPr kumimoji="0" lang="en-US"/>
               <a:t>Click to edit Master title style</a:t>
             </a:r>
-            <a:endParaRPr kumimoji="0" lang="en-US"/>
           </a:p>
         </p:txBody>
       </p:sp>
@@ -4370,10 +4358,9 @@
           <a:lstStyle/>
           <a:p>
             <a:r>
-              <a:rPr kumimoji="0" lang="en-US" smtClean="0"/>
+              <a:rPr kumimoji="0" lang="en-US"/>
               <a:t>Click to edit Master title style</a:t>
             </a:r>
-            <a:endParaRPr kumimoji="0" lang="en-US"/>
           </a:p>
         </p:txBody>
       </p:sp>
@@ -4404,38 +4391,37 @@
           <a:p>
             <a:pPr lvl="0" eaLnBrk="1" latinLnBrk="0" hangingPunct="1"/>
             <a:r>
-              <a:rPr kumimoji="0" lang="en-US" smtClean="0"/>
+              <a:rPr kumimoji="0" lang="en-US"/>
               <a:t>Click to edit Master text styles</a:t>
             </a:r>
           </a:p>
           <a:p>
             <a:pPr lvl="1" eaLnBrk="1" latinLnBrk="0" hangingPunct="1"/>
             <a:r>
-              <a:rPr kumimoji="0" lang="en-US" smtClean="0"/>
+              <a:rPr kumimoji="0" lang="en-US"/>
               <a:t>Second level</a:t>
             </a:r>
           </a:p>
           <a:p>
             <a:pPr lvl="2" eaLnBrk="1" latinLnBrk="0" hangingPunct="1"/>
             <a:r>
-              <a:rPr kumimoji="0" lang="en-US" smtClean="0"/>
+              <a:rPr kumimoji="0" lang="en-US"/>
               <a:t>Third level</a:t>
             </a:r>
           </a:p>
           <a:p>
             <a:pPr lvl="3" eaLnBrk="1" latinLnBrk="0" hangingPunct="1"/>
             <a:r>
-              <a:rPr kumimoji="0" lang="en-US" smtClean="0"/>
+              <a:rPr kumimoji="0" lang="en-US"/>
               <a:t>Fourth level</a:t>
             </a:r>
           </a:p>
           <a:p>
             <a:pPr lvl="4" eaLnBrk="1" latinLnBrk="0" hangingPunct="1"/>
             <a:r>
-              <a:rPr kumimoji="0" lang="en-US" smtClean="0"/>
+              <a:rPr kumimoji="0" lang="en-US"/>
               <a:t>Fifth level</a:t>
             </a:r>
-            <a:endParaRPr kumimoji="0" lang="en-US"/>
           </a:p>
         </p:txBody>
       </p:sp>
@@ -4474,7 +4460,7 @@
             <a:fld id="{B61BEF0D-F0BB-DE4B-95CE-6DB70DBA9567}" type="datetimeFigureOut">
               <a:rPr lang="en-US" smtClean="0"/>
               <a:pPr/>
-              <a:t>12/4/2024</a:t>
+              <a:t>1/2/2025</a:t>
             </a:fld>
             <a:endParaRPr lang="en-US" dirty="0"/>
           </a:p>
@@ -4898,10 +4884,9 @@
           <a:lstStyle/>
           <a:p>
             <a:r>
-              <a:rPr lang="en-US" dirty="0" smtClean="0"/>
+              <a:rPr lang="en-US" dirty="0"/>
               <a:t>Sprint 5 Demonstrations</a:t>
             </a:r>
-            <a:endParaRPr lang="en-US" dirty="0"/>
           </a:p>
         </p:txBody>
       </p:sp>
@@ -4921,10 +4906,9 @@
           <a:lstStyle/>
           <a:p>
             <a:r>
-              <a:rPr lang="en-US" dirty="0" smtClean="0"/>
+              <a:rPr lang="en-US" dirty="0"/>
               <a:t>Neil Kirby</a:t>
             </a:r>
-            <a:endParaRPr lang="en-US" dirty="0"/>
           </a:p>
         </p:txBody>
       </p:sp>
@@ -4981,44 +4965,27 @@
           <a:lstStyle/>
           <a:p>
             <a:r>
-              <a:rPr lang="en-US" dirty="0" smtClean="0"/>
-              <a:t>Have </a:t>
-            </a:r>
-            <a:r>
-              <a:rPr lang="en-US" dirty="0" smtClean="0"/>
-              <a:t>the whole team materially participate in some way</a:t>
-            </a:r>
-          </a:p>
-          <a:p>
-            <a:r>
-              <a:rPr lang="en-US" dirty="0" smtClean="0"/>
-              <a:t>Have the demo </a:t>
-            </a:r>
-            <a:r>
-              <a:rPr lang="en-US" dirty="0" smtClean="0"/>
-              <a:t>portion run </a:t>
-            </a:r>
-            <a:r>
-              <a:rPr lang="en-US" dirty="0" smtClean="0"/>
-              <a:t>between 4 and 5 </a:t>
-            </a:r>
-            <a:r>
-              <a:rPr lang="en-US" dirty="0" smtClean="0"/>
-              <a:t>minutes</a:t>
-            </a:r>
-          </a:p>
-          <a:p>
-            <a:r>
-              <a:rPr lang="en-US" dirty="0" smtClean="0"/>
+              <a:rPr lang="en-US" dirty="0"/>
+              <a:t>Have the whole team materially participate in some way</a:t>
+            </a:r>
+          </a:p>
+          <a:p>
+            <a:r>
+              <a:rPr lang="en-US" dirty="0"/>
+              <a:t>Have the demo portion run between 4 and 5 minutes</a:t>
+            </a:r>
+          </a:p>
+          <a:p>
+            <a:r>
+              <a:rPr lang="en-US" dirty="0"/>
               <a:t>Make sure the game sound levels are loud enough to hear but not so loud that we can’t hear you talk over them</a:t>
             </a:r>
           </a:p>
           <a:p>
             <a:r>
-              <a:rPr lang="en-US" dirty="0" smtClean="0"/>
+              <a:rPr lang="en-US" dirty="0"/>
               <a:t>Make it look practiced and smooth</a:t>
             </a:r>
-            <a:endParaRPr lang="en-US" dirty="0"/>
           </a:p>
         </p:txBody>
       </p:sp>
@@ -5038,10 +5005,9 @@
           <a:lstStyle/>
           <a:p>
             <a:r>
-              <a:rPr lang="en-US" dirty="0" smtClean="0"/>
+              <a:rPr lang="en-US" dirty="0"/>
               <a:t>How not to lose points</a:t>
             </a:r>
-            <a:endParaRPr lang="en-US" dirty="0"/>
           </a:p>
         </p:txBody>
       </p:sp>
@@ -5091,24 +5057,20 @@
           <a:lstStyle/>
           <a:p>
             <a:r>
-              <a:rPr lang="en-US" dirty="0" smtClean="0"/>
+              <a:rPr lang="en-US" dirty="0"/>
               <a:t>1 minute setup</a:t>
             </a:r>
           </a:p>
           <a:p>
             <a:r>
-              <a:rPr lang="en-US" dirty="0" smtClean="0"/>
+              <a:rPr lang="en-US" dirty="0"/>
               <a:t>1 minute to introduce the team and features</a:t>
             </a:r>
           </a:p>
           <a:p>
             <a:r>
-              <a:rPr lang="en-US" dirty="0" smtClean="0"/>
-              <a:t>5 minute (max) </a:t>
-            </a:r>
-            <a:r>
-              <a:rPr lang="en-US" dirty="0" smtClean="0"/>
-              <a:t>demo</a:t>
+              <a:rPr lang="en-US" dirty="0"/>
+              <a:t>5 minute (max) demo</a:t>
             </a:r>
           </a:p>
           <a:p>
@@ -5119,20 +5081,18 @@
               <a:buNone/>
             </a:pPr>
             <a:r>
-              <a:rPr lang="en-US" dirty="0" smtClean="0"/>
+              <a:rPr lang="en-US" dirty="0"/>
               <a:t>(Those time buckets are independent of each other; time spent introducing the team and listing the upcoming features is separate from the time spent running the live demo.)</a:t>
             </a:r>
-            <a:endParaRPr lang="en-US" dirty="0" smtClean="0"/>
           </a:p>
           <a:p>
             <a:endParaRPr lang="en-US" dirty="0"/>
           </a:p>
           <a:p>
             <a:r>
-              <a:rPr lang="en-US" dirty="0" smtClean="0"/>
+              <a:rPr lang="en-US" dirty="0"/>
               <a:t>After all demos, Q&amp;A</a:t>
             </a:r>
-            <a:endParaRPr lang="en-US" dirty="0"/>
           </a:p>
         </p:txBody>
       </p:sp>
@@ -5152,10 +5112,9 @@
           <a:lstStyle/>
           <a:p>
             <a:r>
-              <a:rPr lang="en-US" dirty="0" smtClean="0"/>
+              <a:rPr lang="en-US" dirty="0"/>
               <a:t>Expectations</a:t>
             </a:r>
-            <a:endParaRPr lang="en-US" dirty="0"/>
           </a:p>
         </p:txBody>
       </p:sp>
@@ -5205,19 +5164,19 @@
           <a:lstStyle/>
           <a:p>
             <a:r>
-              <a:rPr lang="en-US" dirty="0" smtClean="0"/>
+              <a:rPr lang="en-US" dirty="0"/>
               <a:t>Awesome cover slide</a:t>
             </a:r>
           </a:p>
           <a:p>
             <a:r>
-              <a:rPr lang="en-US" dirty="0" smtClean="0"/>
+              <a:rPr lang="en-US" dirty="0"/>
               <a:t>Introduce the team</a:t>
             </a:r>
           </a:p>
           <a:p>
             <a:r>
-              <a:rPr lang="en-US" dirty="0" smtClean="0"/>
+              <a:rPr lang="en-US" dirty="0"/>
               <a:t>List the Sprint features</a:t>
             </a:r>
           </a:p>
@@ -5226,44 +5185,42 @@
           </a:p>
           <a:p>
             <a:r>
-              <a:rPr lang="en-US" dirty="0" smtClean="0"/>
-              <a:t>Email to me by </a:t>
-            </a:r>
-            <a:r>
-              <a:rPr lang="en-US" dirty="0" smtClean="0"/>
-              <a:t>Monday</a:t>
-            </a:r>
-            <a:r>
-              <a:rPr lang="en-US" smtClean="0"/>
-              <a:t>, 2-December-2024, </a:t>
-            </a:r>
-            <a:r>
-              <a:rPr lang="en-US" dirty="0" smtClean="0"/>
-              <a:t>midnight.   </a:t>
-            </a:r>
-            <a:endParaRPr lang="en-US" dirty="0" smtClean="0"/>
-          </a:p>
-          <a:p>
-            <a:r>
-              <a:rPr lang="en-US" dirty="0" smtClean="0"/>
+              <a:rPr lang="en-US" dirty="0"/>
+              <a:t>Submit the </a:t>
+            </a:r>
+            <a:r>
+              <a:rPr lang="en-US" u="sng" dirty="0"/>
+              <a:t>file</a:t>
+            </a:r>
+            <a:r>
+              <a:rPr lang="en-US" dirty="0"/>
+              <a:t> to Carmen by the </a:t>
+            </a:r>
+            <a:r>
+              <a:rPr lang="en-US"/>
+              <a:t>due date  </a:t>
+            </a:r>
+            <a:endParaRPr lang="en-US" dirty="0"/>
+          </a:p>
+          <a:p>
+            <a:r>
+              <a:rPr lang="en-US" dirty="0"/>
               <a:t>PowerPoint </a:t>
             </a:r>
             <a:r>
-              <a:rPr lang="en-US" dirty="0" err="1" smtClean="0"/>
+              <a:rPr lang="en-US" dirty="0" err="1"/>
               <a:t>pptx</a:t>
             </a:r>
             <a:r>
-              <a:rPr lang="en-US" dirty="0" smtClean="0"/>
+              <a:rPr lang="en-US" dirty="0"/>
               <a:t> format only</a:t>
             </a:r>
-            <a:endParaRPr lang="en-US" dirty="0" smtClean="0"/>
-          </a:p>
-          <a:p>
-            <a:r>
-              <a:rPr lang="en-US" dirty="0" smtClean="0"/>
+          </a:p>
+          <a:p>
+            <a:r>
+              <a:rPr lang="en-US" dirty="0"/>
               <a:t>Example follows:</a:t>
             </a:r>
-            <a:endParaRPr lang="en-US" dirty="0"/>
           </a:p>
         </p:txBody>
       </p:sp>
@@ -5284,13 +5241,8 @@
           <a:p>
             <a:r>
               <a:rPr lang="en-US" dirty="0"/>
-              <a:t>3</a:t>
-            </a:r>
-            <a:r>
-              <a:rPr lang="en-US" dirty="0" smtClean="0"/>
-              <a:t> PowerPoint Slides</a:t>
-            </a:r>
-            <a:endParaRPr lang="en-US" dirty="0"/>
+              <a:t>3 PowerPoint Slides</a:t>
+            </a:r>
           </a:p>
         </p:txBody>
       </p:sp>
@@ -5340,11 +5292,11 @@
           <a:lstStyle/>
           <a:p>
             <a:r>
-              <a:rPr lang="en-US" dirty="0" smtClean="0"/>
+              <a:rPr lang="en-US" dirty="0"/>
               <a:t>Team </a:t>
             </a:r>
             <a:r>
-              <a:rPr lang="en-US" dirty="0" err="1" smtClean="0"/>
+              <a:rPr lang="en-US" dirty="0" err="1"/>
               <a:t>Suess</a:t>
             </a:r>
             <a:endParaRPr lang="en-US" dirty="0"/>
@@ -5370,7 +5322,7 @@
               <a:buNone/>
             </a:pPr>
             <a:r>
-              <a:rPr lang="en-US" dirty="0" smtClean="0"/>
+              <a:rPr lang="en-US" dirty="0"/>
               <a:t>Oh! The Games You Will Play!</a:t>
             </a:r>
           </a:p>
@@ -5455,7 +5407,7 @@
               <a:buNone/>
             </a:pPr>
             <a:r>
-              <a:rPr lang="en-US" dirty="0" smtClean="0"/>
+              <a:rPr lang="en-US" dirty="0"/>
               <a:t>Thing One, Sam I Am, Clark, and Blue Fish</a:t>
             </a:r>
           </a:p>
@@ -5480,10 +5432,9 @@
           <a:lstStyle/>
           <a:p>
             <a:r>
-              <a:rPr lang="en-US" dirty="0" smtClean="0"/>
+              <a:rPr lang="en-US" dirty="0"/>
               <a:t>Team Seuss is:</a:t>
             </a:r>
-            <a:endParaRPr lang="en-US" dirty="0"/>
           </a:p>
         </p:txBody>
       </p:sp>
@@ -5629,37 +5580,32 @@
           <a:lstStyle/>
           <a:p>
             <a:r>
-              <a:rPr lang="en-US" dirty="0" smtClean="0"/>
+              <a:rPr lang="en-US" dirty="0"/>
               <a:t>Fishbowl balanced on umbrella</a:t>
             </a:r>
           </a:p>
           <a:p>
             <a:r>
-              <a:rPr lang="en-US" dirty="0" smtClean="0"/>
+              <a:rPr lang="en-US" dirty="0"/>
               <a:t>Star power up for </a:t>
             </a:r>
             <a:r>
               <a:rPr lang="en-US" dirty="0" err="1"/>
-              <a:t>S</a:t>
-            </a:r>
-            <a:r>
-              <a:rPr lang="en-US" dirty="0" err="1" smtClean="0"/>
-              <a:t>neeches</a:t>
-            </a:r>
-            <a:endParaRPr lang="en-US" dirty="0" smtClean="0"/>
-          </a:p>
-          <a:p>
-            <a:r>
-              <a:rPr lang="en-US" dirty="0" smtClean="0"/>
+              <a:t>Sneeches</a:t>
+            </a:r>
+            <a:endParaRPr lang="en-US" dirty="0"/>
+          </a:p>
+          <a:p>
+            <a:r>
+              <a:rPr lang="en-US" dirty="0"/>
               <a:t>Landing in a fishbowl</a:t>
             </a:r>
           </a:p>
           <a:p>
             <a:r>
-              <a:rPr lang="en-US" dirty="0" smtClean="0"/>
+              <a:rPr lang="en-US" dirty="0"/>
               <a:t>Pants with nobody in them</a:t>
             </a:r>
-            <a:endParaRPr lang="en-US" dirty="0"/>
           </a:p>
         </p:txBody>
       </p:sp>
@@ -5679,10 +5625,9 @@
           <a:lstStyle/>
           <a:p>
             <a:r>
-              <a:rPr lang="en-US" dirty="0" smtClean="0"/>
+              <a:rPr lang="en-US" dirty="0"/>
               <a:t>Team Seuss Sprint Features</a:t>
             </a:r>
-            <a:endParaRPr lang="en-US" dirty="0"/>
           </a:p>
         </p:txBody>
       </p:sp>
@@ -5732,37 +5677,37 @@
           <a:lstStyle/>
           <a:p>
             <a:r>
-              <a:rPr lang="en-US" dirty="0" smtClean="0"/>
+              <a:rPr lang="en-US" dirty="0"/>
               <a:t>Greet everyone to start</a:t>
             </a:r>
           </a:p>
           <a:p>
             <a:r>
-              <a:rPr lang="en-US" dirty="0" smtClean="0"/>
+              <a:rPr lang="en-US" dirty="0"/>
               <a:t>One person narrates, another person runs the demo</a:t>
             </a:r>
           </a:p>
           <a:p>
             <a:r>
-              <a:rPr lang="en-US" dirty="0" smtClean="0"/>
+              <a:rPr lang="en-US" dirty="0"/>
               <a:t>The pause key may be helpful</a:t>
             </a:r>
           </a:p>
           <a:p>
             <a:r>
-              <a:rPr lang="en-US" dirty="0" smtClean="0"/>
+              <a:rPr lang="en-US" dirty="0"/>
               <a:t>A custom level might be helpful but is not required</a:t>
             </a:r>
           </a:p>
           <a:p>
             <a:r>
-              <a:rPr lang="en-US" dirty="0" smtClean="0"/>
+              <a:rPr lang="en-US" dirty="0"/>
               <a:t>Practice your entire presentation and time it!</a:t>
             </a:r>
           </a:p>
           <a:p>
             <a:r>
-              <a:rPr lang="en-US" dirty="0" smtClean="0"/>
+              <a:rPr lang="en-US" dirty="0"/>
               <a:t>Thank your audience when done</a:t>
             </a:r>
           </a:p>
@@ -5771,10 +5716,9 @@
           </a:p>
           <a:p>
             <a:r>
-              <a:rPr lang="en-US" dirty="0" smtClean="0"/>
+              <a:rPr lang="en-US" dirty="0"/>
               <a:t>Applaud for the other teams when they finish</a:t>
             </a:r>
-            <a:endParaRPr lang="en-US" dirty="0"/>
           </a:p>
         </p:txBody>
       </p:sp>
@@ -5794,10 +5738,9 @@
           <a:lstStyle/>
           <a:p>
             <a:r>
-              <a:rPr lang="en-US" dirty="0" smtClean="0"/>
+              <a:rPr lang="en-US" dirty="0"/>
               <a:t>Suggestions</a:t>
             </a:r>
-            <a:endParaRPr lang="en-US" dirty="0"/>
           </a:p>
         </p:txBody>
       </p:sp>
@@ -5850,7 +5793,7 @@
               <a:buNone/>
             </a:pPr>
             <a:r>
-              <a:rPr lang="en-US" dirty="0" smtClean="0"/>
+              <a:rPr lang="en-US" dirty="0"/>
               <a:t>This demo replaces the in-class portion of the final</a:t>
             </a:r>
           </a:p>
@@ -5862,28 +5805,27 @@
           </a:p>
           <a:p>
             <a:r>
-              <a:rPr lang="en-US" dirty="0" smtClean="0"/>
+              <a:rPr lang="en-US" dirty="0"/>
               <a:t>Practice for it the way you would study for an exam</a:t>
             </a:r>
           </a:p>
           <a:p>
             <a:r>
-              <a:rPr lang="en-US" dirty="0" smtClean="0"/>
+              <a:rPr lang="en-US" dirty="0"/>
               <a:t>Speak clearly and loud enough for people in the back</a:t>
             </a:r>
           </a:p>
           <a:p>
             <a:r>
-              <a:rPr lang="en-US" dirty="0" smtClean="0"/>
+              <a:rPr lang="en-US" dirty="0"/>
               <a:t>Try to make the demo flow from feature to feature and match the commentary to that flow</a:t>
             </a:r>
           </a:p>
           <a:p>
             <a:r>
-              <a:rPr lang="en-US" dirty="0" smtClean="0"/>
+              <a:rPr lang="en-US" dirty="0"/>
               <a:t>You really want to have zero crashes / feature failures</a:t>
             </a:r>
-            <a:endParaRPr lang="en-US" dirty="0"/>
           </a:p>
         </p:txBody>
       </p:sp>
@@ -5903,10 +5845,9 @@
           <a:lstStyle/>
           <a:p>
             <a:r>
-              <a:rPr lang="en-US" dirty="0" smtClean="0"/>
+              <a:rPr lang="en-US" dirty="0"/>
               <a:t>In case you were wondering</a:t>
             </a:r>
-            <a:endParaRPr lang="en-US" dirty="0"/>
           </a:p>
         </p:txBody>
       </p:sp>
@@ -5963,34 +5904,30 @@
           <a:lstStyle/>
           <a:p>
             <a:r>
-              <a:rPr lang="en-US" dirty="0" smtClean="0"/>
+              <a:rPr lang="en-US" dirty="0"/>
               <a:t>Scan the room making eye contact with every single person there as you go</a:t>
             </a:r>
           </a:p>
           <a:p>
             <a:r>
-              <a:rPr lang="en-US" dirty="0" smtClean="0"/>
+              <a:rPr lang="en-US" dirty="0"/>
               <a:t>Talk to us, not the screen – know the slides and demo so well you can wave your hand at the screen behind you without looking at it</a:t>
             </a:r>
           </a:p>
           <a:p>
             <a:r>
-              <a:rPr lang="en-US" dirty="0" smtClean="0"/>
+              <a:rPr lang="en-US" dirty="0"/>
               <a:t>Speak loudly enough so that the person in the back of the room who is grading your team can easily hear you</a:t>
             </a:r>
           </a:p>
           <a:p>
             <a:r>
-              <a:rPr lang="en-US" dirty="0" smtClean="0"/>
-              <a:t>Slide in some commentary about the tech underpinning the features as you go over the </a:t>
-            </a:r>
-            <a:r>
-              <a:rPr lang="en-US" dirty="0" smtClean="0"/>
-              <a:t>features</a:t>
-            </a:r>
-          </a:p>
-          <a:p>
-            <a:endParaRPr lang="en-US" dirty="0" smtClean="0"/>
+              <a:rPr lang="en-US" dirty="0"/>
+              <a:t>Slide in some commentary about the tech underpinning the features as you go over the features</a:t>
+            </a:r>
+          </a:p>
+          <a:p>
+            <a:endParaRPr lang="en-US" dirty="0"/>
           </a:p>
         </p:txBody>
       </p:sp>
@@ -6010,10 +5947,9 @@
           <a:lstStyle/>
           <a:p>
             <a:r>
-              <a:rPr lang="en-US" dirty="0" smtClean="0"/>
+              <a:rPr lang="en-US" dirty="0"/>
               <a:t>How not to lose points</a:t>
             </a:r>
-            <a:endParaRPr lang="en-US" dirty="0"/>
           </a:p>
         </p:txBody>
       </p:sp>
